--- a/01 Classes/Aula 01. 1 Desenvolvimento de Software  Java - CGI_Servlets Padrões DAO_MVC.pptx
+++ b/01 Classes/Aula 01. 1 Desenvolvimento de Software  Java - CGI_Servlets Padrões DAO_MVC.pptx
@@ -3884,20 +3884,25 @@
               <a:t>Desenvolvimento de Software </a:t>
             </a:r>
             <a:br>
-              <a:rPr lang="pt-BR" sz="4800" b="1" dirty="0">
+              <a:rPr lang="pt-BR" sz="4800" b="1">
                 <a:solidFill>
                   <a:schemeClr val="bg1"/>
                 </a:solidFill>
               </a:rPr>
             </a:br>
             <a:r>
-              <a:rPr lang="pt-BR" sz="4800" b="1" dirty="0">
+              <a:rPr lang="pt-BR" sz="4800" b="1">
                 <a:solidFill>
                   <a:schemeClr val="bg1"/>
                 </a:solidFill>
               </a:rPr>
-              <a:t>JAVA</a:t>
-            </a:r>
+              <a:t>JAVA </a:t>
+            </a:r>
+            <a:endParaRPr lang="pt-BR" sz="4800" b="1" dirty="0">
+              <a:solidFill>
+                <a:schemeClr val="bg1"/>
+              </a:solidFill>
+            </a:endParaRPr>
           </a:p>
         </p:txBody>
       </p:sp>
@@ -4920,6 +4925,16 @@
               </a:rPr>
               <a:t>implementations</a:t>
             </a:r>
+            <a:r>
+              <a:rPr lang="pt-BR" sz="2400">
+                <a:solidFill>
+                  <a:schemeClr val="tx1"/>
+                </a:solidFill>
+                <a:latin typeface="Times New Roman" panose="02020603050405020304" pitchFamily="18" charset="0"/>
+                <a:cs typeface="Times New Roman" panose="02020603050405020304" pitchFamily="18" charset="0"/>
+              </a:rPr>
+              <a:t> </a:t>
+            </a:r>
             <a:endParaRPr lang="pt-BR" sz="2400" dirty="0">
               <a:solidFill>
                 <a:schemeClr val="tx1"/>
@@ -4982,7 +4997,47 @@
                 <a:latin typeface="Times New Roman" panose="02020603050405020304" pitchFamily="18" charset="0"/>
                 <a:cs typeface="Times New Roman" panose="02020603050405020304" pitchFamily="18" charset="0"/>
               </a:rPr>
-              <a:t>POCO/POJO</a:t>
+              <a:t>POCO/</a:t>
+            </a:r>
+            <a:r>
+              <a:rPr lang="pt-BR" sz="2400" b="1" dirty="0">
+                <a:solidFill>
+                  <a:srgbClr val="FF0000"/>
+                </a:solidFill>
+                <a:latin typeface="Times New Roman" panose="02020603050405020304" pitchFamily="18" charset="0"/>
+                <a:cs typeface="Times New Roman" panose="02020603050405020304" pitchFamily="18" charset="0"/>
+              </a:rPr>
+              <a:t>POJO</a:t>
+            </a:r>
+            <a:r>
+              <a:rPr lang="pt-BR" sz="2400" b="1" dirty="0">
+                <a:solidFill>
+                  <a:schemeClr val="tx1"/>
+                </a:solidFill>
+                <a:latin typeface="Times New Roman" panose="02020603050405020304" pitchFamily="18" charset="0"/>
+                <a:cs typeface="Times New Roman" panose="02020603050405020304" pitchFamily="18" charset="0"/>
+              </a:rPr>
+              <a:t>/</a:t>
+            </a:r>
+            <a:r>
+              <a:rPr lang="pt-BR" sz="2400" b="1" dirty="0">
+                <a:solidFill>
+                  <a:srgbClr val="FF0000"/>
+                </a:solidFill>
+                <a:latin typeface="Times New Roman" panose="02020603050405020304" pitchFamily="18" charset="0"/>
+                <a:cs typeface="Times New Roman" panose="02020603050405020304" pitchFamily="18" charset="0"/>
+              </a:rPr>
+              <a:t>DTO</a:t>
+            </a:r>
+            <a:r>
+              <a:rPr lang="pt-BR" sz="2400" b="1" dirty="0">
+                <a:solidFill>
+                  <a:schemeClr val="tx1"/>
+                </a:solidFill>
+                <a:latin typeface="Times New Roman" panose="02020603050405020304" pitchFamily="18" charset="0"/>
+                <a:cs typeface="Times New Roman" panose="02020603050405020304" pitchFamily="18" charset="0"/>
+              </a:rPr>
+              <a:t>/PDS/POD</a:t>
             </a:r>
             <a:r>
               <a:rPr lang="pt-BR" sz="2400" dirty="0">
@@ -7793,7 +7848,7 @@
         </p:nvSpPr>
         <p:spPr>
           <a:xfrm>
-            <a:off x="457200" y="205980"/>
+            <a:off x="457200" y="78980"/>
             <a:ext cx="8229600" cy="857251"/>
           </a:xfrm>
         </p:spPr>
@@ -7960,14 +8015,14 @@
           <p:nvPr>
             <p:extLst>
               <p:ext uri="{D42A27DB-BD31-4B8C-83A1-F6EECF244321}">
-                <p14:modId xmlns:p14="http://schemas.microsoft.com/office/powerpoint/2010/main" val="2712914397"/>
+                <p14:modId xmlns:p14="http://schemas.microsoft.com/office/powerpoint/2010/main" val="232845220"/>
               </p:ext>
             </p:extLst>
           </p:nvPr>
         </p:nvGraphicFramePr>
         <p:xfrm>
-          <a:off x="1275004" y="888642"/>
-          <a:ext cx="5782616" cy="4048877"/>
+          <a:off x="142865" y="723900"/>
+          <a:ext cx="6816735" cy="4395208"/>
         </p:xfrm>
         <a:graphic>
           <a:graphicData uri="http://schemas.openxmlformats.org/drawingml/2006/table">
@@ -7976,21 +8031,21 @@
                 <a:tableStyleId>{5C22544A-7EE6-4342-B048-85BDC9FD1C3A}</a:tableStyleId>
               </a:tblPr>
               <a:tblGrid>
-                <a:gridCol w="1510303">
+                <a:gridCol w="1780395">
                   <a:extLst>
                     <a:ext uri="{9D8B030D-6E8A-4147-A177-3AD203B41FA5}">
                       <a16:colId xmlns:a16="http://schemas.microsoft.com/office/drawing/2014/main" val="542220703"/>
                     </a:ext>
                   </a:extLst>
                 </a:gridCol>
-                <a:gridCol w="2068757">
+                <a:gridCol w="2438717">
                   <a:extLst>
                     <a:ext uri="{9D8B030D-6E8A-4147-A177-3AD203B41FA5}">
                       <a16:colId xmlns:a16="http://schemas.microsoft.com/office/drawing/2014/main" val="536404029"/>
                     </a:ext>
                   </a:extLst>
                 </a:gridCol>
-                <a:gridCol w="2203556">
+                <a:gridCol w="2597623">
                   <a:extLst>
                     <a:ext uri="{9D8B030D-6E8A-4147-A177-3AD203B41FA5}">
                       <a16:colId xmlns:a16="http://schemas.microsoft.com/office/drawing/2014/main" val="1190264760"/>
@@ -7998,7 +8053,7 @@
                   </a:extLst>
                 </a:gridCol>
               </a:tblGrid>
-              <a:tr h="182926">
+              <a:tr h="221165">
                 <a:tc>
                   <a:txBody>
                     <a:bodyPr/>
@@ -8006,14 +8061,14 @@
                     <a:p>
                       <a:pPr algn="ctr" fontAlgn="b"/>
                       <a:r>
-                        <a:rPr lang="pt-BR" sz="900" b="1" u="none" strike="noStrike">
+                        <a:rPr lang="pt-BR" sz="1200" b="1" u="none" strike="noStrike" dirty="0">
                           <a:effectLst/>
                           <a:latin typeface="Times New Roman" panose="02020603050405020304" pitchFamily="18" charset="0"/>
                           <a:cs typeface="Times New Roman" panose="02020603050405020304" pitchFamily="18" charset="0"/>
                         </a:rPr>
                         <a:t>Base para comparação</a:t>
                       </a:r>
-                      <a:endParaRPr lang="pt-BR" sz="900" b="1" i="0" u="none" strike="noStrike">
+                      <a:endParaRPr lang="pt-BR" sz="1200" b="1" i="0" u="none" strike="noStrike" dirty="0">
                         <a:solidFill>
                           <a:srgbClr val="000000"/>
                         </a:solidFill>
@@ -8032,14 +8087,14 @@
                     <a:p>
                       <a:pPr algn="ctr" fontAlgn="b"/>
                       <a:r>
-                        <a:rPr lang="pt-BR" sz="900" b="1" u="none" strike="noStrike">
+                        <a:rPr lang="pt-BR" sz="1200" b="1" u="none" strike="noStrike">
                           <a:effectLst/>
                           <a:latin typeface="Times New Roman" panose="02020603050405020304" pitchFamily="18" charset="0"/>
                           <a:cs typeface="Times New Roman" panose="02020603050405020304" pitchFamily="18" charset="0"/>
                         </a:rPr>
                         <a:t>CGI</a:t>
                       </a:r>
-                      <a:endParaRPr lang="pt-BR" sz="900" b="1" i="0" u="none" strike="noStrike">
+                      <a:endParaRPr lang="pt-BR" sz="1200" b="1" i="0" u="none" strike="noStrike">
                         <a:solidFill>
                           <a:srgbClr val="000000"/>
                         </a:solidFill>
@@ -8058,14 +8113,14 @@
                     <a:p>
                       <a:pPr algn="ctr" fontAlgn="b"/>
                       <a:r>
-                        <a:rPr lang="pt-BR" sz="900" b="1" u="none" strike="noStrike" dirty="0" err="1">
+                        <a:rPr lang="pt-BR" sz="1200" b="1" u="none" strike="noStrike" dirty="0" err="1">
                           <a:effectLst/>
                           <a:latin typeface="Times New Roman" panose="02020603050405020304" pitchFamily="18" charset="0"/>
                           <a:cs typeface="Times New Roman" panose="02020603050405020304" pitchFamily="18" charset="0"/>
                         </a:rPr>
                         <a:t>Servlet</a:t>
                       </a:r>
-                      <a:endParaRPr lang="pt-BR" sz="900" b="1" i="0" u="none" strike="noStrike" dirty="0">
+                      <a:endParaRPr lang="pt-BR" sz="1200" b="1" i="0" u="none" strike="noStrike" dirty="0">
                         <a:solidFill>
                           <a:srgbClr val="000000"/>
                         </a:solidFill>
@@ -8083,7 +8138,7 @@
                   </a:ext>
                 </a:extLst>
               </a:tr>
-              <a:tr h="480833">
+              <a:tr h="581343">
                 <a:tc>
                   <a:txBody>
                     <a:bodyPr/>
@@ -8091,14 +8146,14 @@
                     <a:p>
                       <a:pPr algn="l" fontAlgn="b"/>
                       <a:r>
-                        <a:rPr lang="pt-BR" sz="900" u="none" strike="noStrike" dirty="0">
+                        <a:rPr lang="pt-BR" sz="1200" u="none" strike="noStrike" dirty="0">
                           <a:effectLst/>
                           <a:latin typeface="Times New Roman" panose="02020603050405020304" pitchFamily="18" charset="0"/>
                           <a:cs typeface="Times New Roman" panose="02020603050405020304" pitchFamily="18" charset="0"/>
                         </a:rPr>
                         <a:t>Basic</a:t>
                       </a:r>
-                      <a:endParaRPr lang="pt-BR" sz="900" b="0" i="0" u="none" strike="noStrike" dirty="0">
+                      <a:endParaRPr lang="pt-BR" sz="1200" b="0" i="0" u="none" strike="noStrike" dirty="0">
                         <a:solidFill>
                           <a:srgbClr val="000000"/>
                         </a:solidFill>
@@ -8117,14 +8172,14 @@
                     <a:p>
                       <a:pPr algn="l" fontAlgn="b"/>
                       <a:r>
-                        <a:rPr lang="pt-BR" sz="900" u="none" strike="noStrike">
+                        <a:rPr lang="pt-BR" sz="1200" u="none" strike="noStrike" dirty="0">
                           <a:effectLst/>
                           <a:latin typeface="Times New Roman" panose="02020603050405020304" pitchFamily="18" charset="0"/>
                           <a:cs typeface="Times New Roman" panose="02020603050405020304" pitchFamily="18" charset="0"/>
                         </a:rPr>
                         <a:t>Programas são escritos no sistema operacional nativo.</a:t>
                       </a:r>
-                      <a:endParaRPr lang="pt-BR" sz="900" b="0" i="0" u="none" strike="noStrike">
+                      <a:endParaRPr lang="pt-BR" sz="1200" b="0" i="0" u="none" strike="noStrike" dirty="0">
                         <a:solidFill>
                           <a:srgbClr val="000000"/>
                         </a:solidFill>
@@ -8143,14 +8198,14 @@
                     <a:p>
                       <a:pPr algn="l" fontAlgn="b"/>
                       <a:r>
-                        <a:rPr lang="pt-BR" sz="900" u="none" strike="noStrike">
+                        <a:rPr lang="pt-BR" sz="1200" u="none" strike="noStrike">
                           <a:effectLst/>
                           <a:latin typeface="Times New Roman" panose="02020603050405020304" pitchFamily="18" charset="0"/>
                           <a:cs typeface="Times New Roman" panose="02020603050405020304" pitchFamily="18" charset="0"/>
                         </a:rPr>
                         <a:t>Programas empregados usando Java.</a:t>
                       </a:r>
-                      <a:endParaRPr lang="pt-BR" sz="900" b="0" i="0" u="none" strike="noStrike">
+                      <a:endParaRPr lang="pt-BR" sz="1200" b="0" i="0" u="none" strike="noStrike">
                         <a:solidFill>
                           <a:srgbClr val="000000"/>
                         </a:solidFill>
@@ -8168,7 +8223,7 @@
                   </a:ext>
                 </a:extLst>
               </a:tr>
-              <a:tr h="480187">
+              <a:tr h="330836">
                 <a:tc>
                   <a:txBody>
                     <a:bodyPr/>
@@ -8176,14 +8231,14 @@
                     <a:p>
                       <a:pPr algn="l" fontAlgn="b"/>
                       <a:r>
-                        <a:rPr lang="pt-BR" sz="900" u="none" strike="noStrike">
+                        <a:rPr lang="pt-BR" sz="1200" u="none" strike="noStrike" dirty="0">
                           <a:effectLst/>
                           <a:latin typeface="Times New Roman" panose="02020603050405020304" pitchFamily="18" charset="0"/>
                           <a:cs typeface="Times New Roman" panose="02020603050405020304" pitchFamily="18" charset="0"/>
                         </a:rPr>
                         <a:t>Dependência de Plataforma</a:t>
                       </a:r>
-                      <a:endParaRPr lang="pt-BR" sz="900" b="0" i="0" u="none" strike="noStrike">
+                      <a:endParaRPr lang="pt-BR" sz="1200" b="0" i="0" u="none" strike="noStrike" dirty="0">
                         <a:solidFill>
                           <a:srgbClr val="000000"/>
                         </a:solidFill>
@@ -8202,14 +8257,14 @@
                     <a:p>
                       <a:pPr algn="l" fontAlgn="b"/>
                       <a:r>
-                        <a:rPr lang="pt-BR" sz="900" u="none" strike="noStrike" dirty="0">
+                        <a:rPr lang="pt-BR" sz="1200" u="none" strike="noStrike" dirty="0">
                           <a:effectLst/>
                           <a:latin typeface="Times New Roman" panose="02020603050405020304" pitchFamily="18" charset="0"/>
                           <a:cs typeface="Times New Roman" panose="02020603050405020304" pitchFamily="18" charset="0"/>
                         </a:rPr>
                         <a:t>Dependente da plataforma</a:t>
                       </a:r>
-                      <a:endParaRPr lang="pt-BR" sz="900" b="0" i="0" u="none" strike="noStrike" dirty="0">
+                      <a:endParaRPr lang="pt-BR" sz="1200" b="0" i="0" u="none" strike="noStrike" dirty="0">
                         <a:solidFill>
                           <a:srgbClr val="000000"/>
                         </a:solidFill>
@@ -8228,14 +8283,14 @@
                     <a:p>
                       <a:pPr algn="l" fontAlgn="b"/>
                       <a:r>
-                        <a:rPr lang="pt-BR" sz="900" u="none" strike="noStrike">
+                        <a:rPr lang="pt-BR" sz="1200" u="none" strike="noStrike" dirty="0">
                           <a:effectLst/>
                           <a:latin typeface="Times New Roman" panose="02020603050405020304" pitchFamily="18" charset="0"/>
                           <a:cs typeface="Times New Roman" panose="02020603050405020304" pitchFamily="18" charset="0"/>
                         </a:rPr>
                         <a:t>Não confia na plataforma</a:t>
                       </a:r>
-                      <a:endParaRPr lang="pt-BR" sz="900" b="0" i="0" u="none" strike="noStrike">
+                      <a:endParaRPr lang="pt-BR" sz="1200" b="0" i="0" u="none" strike="noStrike" dirty="0">
                         <a:solidFill>
                           <a:srgbClr val="000000"/>
                         </a:solidFill>
@@ -8253,7 +8308,7 @@
                   </a:ext>
                 </a:extLst>
               </a:tr>
-              <a:tr h="480833">
+              <a:tr h="513766">
                 <a:tc>
                   <a:txBody>
                     <a:bodyPr/>
@@ -8261,14 +8316,14 @@
                     <a:p>
                       <a:pPr algn="l" fontAlgn="b"/>
                       <a:r>
-                        <a:rPr lang="pt-BR" sz="900" u="none" strike="noStrike">
+                        <a:rPr lang="pt-BR" sz="1200" u="none" strike="noStrike" dirty="0">
                           <a:effectLst/>
                           <a:latin typeface="Times New Roman" panose="02020603050405020304" pitchFamily="18" charset="0"/>
                           <a:cs typeface="Times New Roman" panose="02020603050405020304" pitchFamily="18" charset="0"/>
                         </a:rPr>
                         <a:t>Criação de processo</a:t>
                       </a:r>
-                      <a:endParaRPr lang="pt-BR" sz="900" b="0" i="0" u="none" strike="noStrike">
+                      <a:endParaRPr lang="pt-BR" sz="1200" b="0" i="0" u="none" strike="noStrike" dirty="0">
                         <a:solidFill>
                           <a:srgbClr val="000000"/>
                         </a:solidFill>
@@ -8287,14 +8342,14 @@
                     <a:p>
                       <a:pPr algn="l" fontAlgn="b"/>
                       <a:r>
-                        <a:rPr lang="pt-BR" sz="900" u="none" strike="noStrike" dirty="0">
+                        <a:rPr lang="pt-BR" sz="1200" u="none" strike="noStrike" dirty="0">
                           <a:effectLst/>
                           <a:latin typeface="Times New Roman" panose="02020603050405020304" pitchFamily="18" charset="0"/>
                           <a:cs typeface="Times New Roman" panose="02020603050405020304" pitchFamily="18" charset="0"/>
                         </a:rPr>
                         <a:t>Cada solicitação do cliente cria seu próprio processo.</a:t>
                       </a:r>
-                      <a:endParaRPr lang="pt-BR" sz="900" b="0" i="0" u="none" strike="noStrike" dirty="0">
+                      <a:endParaRPr lang="pt-BR" sz="1200" b="0" i="0" u="none" strike="noStrike" dirty="0">
                         <a:solidFill>
                           <a:srgbClr val="000000"/>
                         </a:solidFill>
@@ -8313,14 +8368,14 @@
                     <a:p>
                       <a:pPr algn="l" fontAlgn="b"/>
                       <a:r>
-                        <a:rPr lang="pt-BR" sz="900" u="none" strike="noStrike">
+                        <a:rPr lang="pt-BR" sz="1200" u="none" strike="noStrike">
                           <a:effectLst/>
                           <a:latin typeface="Times New Roman" panose="02020603050405020304" pitchFamily="18" charset="0"/>
                           <a:cs typeface="Times New Roman" panose="02020603050405020304" pitchFamily="18" charset="0"/>
                         </a:rPr>
                         <a:t>Os processos são criados dependendo do tipo de solicitação do cliente.</a:t>
                       </a:r>
-                      <a:endParaRPr lang="pt-BR" sz="900" b="0" i="0" u="none" strike="noStrike">
+                      <a:endParaRPr lang="pt-BR" sz="1200" b="0" i="0" u="none" strike="noStrike">
                         <a:solidFill>
                           <a:srgbClr val="000000"/>
                         </a:solidFill>
@@ -8338,7 +8393,7 @@
                   </a:ext>
                 </a:extLst>
               </a:tr>
-              <a:tr h="633173">
+              <a:tr h="485521">
                 <a:tc>
                   <a:txBody>
                     <a:bodyPr/>
@@ -8346,14 +8401,14 @@
                     <a:p>
                       <a:pPr algn="l" fontAlgn="b"/>
                       <a:r>
-                        <a:rPr lang="pt-BR" sz="900" u="none" strike="noStrike">
+                        <a:rPr lang="pt-BR" sz="1200" u="none" strike="noStrike" dirty="0">
                           <a:effectLst/>
                           <a:latin typeface="Times New Roman" panose="02020603050405020304" pitchFamily="18" charset="0"/>
                           <a:cs typeface="Times New Roman" panose="02020603050405020304" pitchFamily="18" charset="0"/>
                         </a:rPr>
                         <a:t>Conversão do roteiro</a:t>
                       </a:r>
-                      <a:endParaRPr lang="pt-BR" sz="900" b="0" i="0" u="none" strike="noStrike">
+                      <a:endParaRPr lang="pt-BR" sz="1200" b="0" i="0" u="none" strike="noStrike" dirty="0">
                         <a:solidFill>
                           <a:srgbClr val="000000"/>
                         </a:solidFill>
@@ -8372,14 +8427,14 @@
                     <a:p>
                       <a:pPr algn="l" fontAlgn="b"/>
                       <a:r>
-                        <a:rPr lang="pt-BR" sz="900" u="none" strike="noStrike">
+                        <a:rPr lang="pt-BR" sz="1200" u="none" strike="noStrike" dirty="0">
                           <a:effectLst/>
                           <a:latin typeface="Times New Roman" panose="02020603050405020304" pitchFamily="18" charset="0"/>
                           <a:cs typeface="Times New Roman" panose="02020603050405020304" pitchFamily="18" charset="0"/>
                         </a:rPr>
                         <a:t>Presente na forma de executáveis ​​(nativo para o sistema operacional do servidor).</a:t>
                       </a:r>
-                      <a:endParaRPr lang="pt-BR" sz="900" b="0" i="0" u="none" strike="noStrike">
+                      <a:endParaRPr lang="pt-BR" sz="1200" b="0" i="0" u="none" strike="noStrike" dirty="0">
                         <a:solidFill>
                           <a:srgbClr val="000000"/>
                         </a:solidFill>
@@ -8398,14 +8453,14 @@
                     <a:p>
                       <a:pPr algn="l" fontAlgn="b"/>
                       <a:r>
-                        <a:rPr lang="pt-BR" sz="900" u="none" strike="noStrike">
+                        <a:rPr lang="pt-BR" sz="1200" u="none" strike="noStrike">
                           <a:effectLst/>
                           <a:latin typeface="Times New Roman" panose="02020603050405020304" pitchFamily="18" charset="0"/>
                           <a:cs typeface="Times New Roman" panose="02020603050405020304" pitchFamily="18" charset="0"/>
                         </a:rPr>
                         <a:t>Compilado para Java Bytecode.</a:t>
                       </a:r>
-                      <a:endParaRPr lang="pt-BR" sz="900" b="0" i="0" u="none" strike="noStrike">
+                      <a:endParaRPr lang="pt-BR" sz="1200" b="0" i="0" u="none" strike="noStrike">
                         <a:solidFill>
                           <a:srgbClr val="000000"/>
                         </a:solidFill>
@@ -8423,7 +8478,7 @@
                   </a:ext>
                 </a:extLst>
               </a:tr>
-              <a:tr h="327523">
+              <a:tr h="373840">
                 <a:tc>
                   <a:txBody>
                     <a:bodyPr/>
@@ -8431,14 +8486,14 @@
                     <a:p>
                       <a:pPr algn="l" fontAlgn="b"/>
                       <a:r>
-                        <a:rPr lang="pt-BR" sz="900" u="none" strike="noStrike">
+                        <a:rPr lang="pt-BR" sz="1200" u="none" strike="noStrike">
                           <a:effectLst/>
                           <a:latin typeface="Times New Roman" panose="02020603050405020304" pitchFamily="18" charset="0"/>
                           <a:cs typeface="Times New Roman" panose="02020603050405020304" pitchFamily="18" charset="0"/>
                         </a:rPr>
                         <a:t>Corre em</a:t>
                       </a:r>
-                      <a:endParaRPr lang="pt-BR" sz="900" b="0" i="0" u="none" strike="noStrike">
+                      <a:endParaRPr lang="pt-BR" sz="1200" b="0" i="0" u="none" strike="noStrike">
                         <a:solidFill>
                           <a:srgbClr val="000000"/>
                         </a:solidFill>
@@ -8457,14 +8512,14 @@
                     <a:p>
                       <a:pPr algn="l" fontAlgn="b"/>
                       <a:r>
-                        <a:rPr lang="pt-BR" sz="900" u="none" strike="noStrike">
+                        <a:rPr lang="pt-BR" sz="1200" u="none" strike="noStrike" dirty="0">
                           <a:effectLst/>
                           <a:latin typeface="Times New Roman" panose="02020603050405020304" pitchFamily="18" charset="0"/>
                           <a:cs typeface="Times New Roman" panose="02020603050405020304" pitchFamily="18" charset="0"/>
                         </a:rPr>
                         <a:t>Processo separado</a:t>
                       </a:r>
-                      <a:endParaRPr lang="pt-BR" sz="900" b="0" i="0" u="none" strike="noStrike">
+                      <a:endParaRPr lang="pt-BR" sz="1200" b="0" i="0" u="none" strike="noStrike" dirty="0">
                         <a:solidFill>
                           <a:srgbClr val="000000"/>
                         </a:solidFill>
@@ -8483,14 +8538,14 @@
                     <a:p>
                       <a:pPr algn="l" fontAlgn="b"/>
                       <a:r>
-                        <a:rPr lang="pt-BR" sz="900" u="none" strike="noStrike">
+                        <a:rPr lang="pt-BR" sz="1200" u="none" strike="noStrike">
                           <a:effectLst/>
                           <a:latin typeface="Times New Roman" panose="02020603050405020304" pitchFamily="18" charset="0"/>
                           <a:cs typeface="Times New Roman" panose="02020603050405020304" pitchFamily="18" charset="0"/>
                         </a:rPr>
                         <a:t>JVM</a:t>
                       </a:r>
-                      <a:endParaRPr lang="pt-BR" sz="900" b="0" i="0" u="none" strike="noStrike">
+                      <a:endParaRPr lang="pt-BR" sz="1200" b="0" i="0" u="none" strike="noStrike">
                         <a:solidFill>
                           <a:srgbClr val="000000"/>
                         </a:solidFill>
@@ -8508,7 +8563,7 @@
                   </a:ext>
                 </a:extLst>
               </a:tr>
-              <a:tr h="327523">
+              <a:tr h="395985">
                 <a:tc>
                   <a:txBody>
                     <a:bodyPr/>
@@ -8516,14 +8571,14 @@
                     <a:p>
                       <a:pPr algn="l" fontAlgn="b"/>
                       <a:r>
-                        <a:rPr lang="pt-BR" sz="900" u="none" strike="noStrike">
+                        <a:rPr lang="pt-BR" sz="1200" u="none" strike="noStrike">
                           <a:effectLst/>
                           <a:latin typeface="Times New Roman" panose="02020603050405020304" pitchFamily="18" charset="0"/>
                           <a:cs typeface="Times New Roman" panose="02020603050405020304" pitchFamily="18" charset="0"/>
                         </a:rPr>
                         <a:t>Segurança</a:t>
                       </a:r>
-                      <a:endParaRPr lang="pt-BR" sz="900" b="0" i="0" u="none" strike="noStrike">
+                      <a:endParaRPr lang="pt-BR" sz="1200" b="0" i="0" u="none" strike="noStrike">
                         <a:solidFill>
                           <a:srgbClr val="000000"/>
                         </a:solidFill>
@@ -8542,14 +8597,14 @@
                     <a:p>
                       <a:pPr algn="l" fontAlgn="b"/>
                       <a:r>
-                        <a:rPr lang="pt-BR" sz="900" u="none" strike="noStrike">
+                        <a:rPr lang="pt-BR" sz="1200" u="none" strike="noStrike" dirty="0">
                           <a:effectLst/>
                           <a:latin typeface="Times New Roman" panose="02020603050405020304" pitchFamily="18" charset="0"/>
                           <a:cs typeface="Times New Roman" panose="02020603050405020304" pitchFamily="18" charset="0"/>
                         </a:rPr>
                         <a:t>Mais vulnerável a ataques.</a:t>
                       </a:r>
-                      <a:endParaRPr lang="pt-BR" sz="900" b="0" i="0" u="none" strike="noStrike">
+                      <a:endParaRPr lang="pt-BR" sz="1200" b="0" i="0" u="none" strike="noStrike" dirty="0">
                         <a:solidFill>
                           <a:srgbClr val="000000"/>
                         </a:solidFill>
@@ -8568,14 +8623,14 @@
                     <a:p>
                       <a:pPr algn="l" fontAlgn="b"/>
                       <a:r>
-                        <a:rPr lang="pt-BR" sz="900" u="none" strike="noStrike">
+                        <a:rPr lang="pt-BR" sz="1200" u="none" strike="noStrike">
                           <a:effectLst/>
                           <a:latin typeface="Times New Roman" panose="02020603050405020304" pitchFamily="18" charset="0"/>
                           <a:cs typeface="Times New Roman" panose="02020603050405020304" pitchFamily="18" charset="0"/>
                         </a:rPr>
                         <a:t>Pode resistir a ataques.</a:t>
                       </a:r>
-                      <a:endParaRPr lang="pt-BR" sz="900" b="0" i="0" u="none" strike="noStrike">
+                      <a:endParaRPr lang="pt-BR" sz="1200" b="0" i="0" u="none" strike="noStrike">
                         <a:solidFill>
                           <a:srgbClr val="000000"/>
                         </a:solidFill>
@@ -8593,7 +8648,7 @@
                   </a:ext>
                 </a:extLst>
               </a:tr>
-              <a:tr h="327523">
+              <a:tr h="395985">
                 <a:tc>
                   <a:txBody>
                     <a:bodyPr/>
@@ -8601,14 +8656,14 @@
                     <a:p>
                       <a:pPr algn="l" fontAlgn="b"/>
                       <a:r>
-                        <a:rPr lang="pt-BR" sz="900" u="none" strike="noStrike">
+                        <a:rPr lang="pt-BR" sz="1200" u="none" strike="noStrike">
                           <a:effectLst/>
                           <a:latin typeface="Times New Roman" panose="02020603050405020304" pitchFamily="18" charset="0"/>
                           <a:cs typeface="Times New Roman" panose="02020603050405020304" pitchFamily="18" charset="0"/>
                         </a:rPr>
                         <a:t>Rapidez</a:t>
                       </a:r>
-                      <a:endParaRPr lang="pt-BR" sz="900" b="0" i="0" u="none" strike="noStrike">
+                      <a:endParaRPr lang="pt-BR" sz="1200" b="0" i="0" u="none" strike="noStrike">
                         <a:solidFill>
                           <a:srgbClr val="000000"/>
                         </a:solidFill>
@@ -8627,14 +8682,14 @@
                     <a:p>
                       <a:pPr algn="l" fontAlgn="b"/>
                       <a:r>
-                        <a:rPr lang="pt-BR" sz="900" u="none" strike="noStrike">
+                        <a:rPr lang="pt-BR" sz="1200" u="none" strike="noStrike">
                           <a:effectLst/>
                           <a:latin typeface="Times New Roman" panose="02020603050405020304" pitchFamily="18" charset="0"/>
                           <a:cs typeface="Times New Roman" panose="02020603050405020304" pitchFamily="18" charset="0"/>
                         </a:rPr>
                         <a:t>Mais devagar</a:t>
                       </a:r>
-                      <a:endParaRPr lang="pt-BR" sz="900" b="0" i="0" u="none" strike="noStrike">
+                      <a:endParaRPr lang="pt-BR" sz="1200" b="0" i="0" u="none" strike="noStrike">
                         <a:solidFill>
                           <a:srgbClr val="000000"/>
                         </a:solidFill>
@@ -8653,14 +8708,14 @@
                     <a:p>
                       <a:pPr algn="l" fontAlgn="b"/>
                       <a:r>
-                        <a:rPr lang="pt-BR" sz="900" u="none" strike="noStrike">
+                        <a:rPr lang="pt-BR" sz="1200" u="none" strike="noStrike" dirty="0">
                           <a:effectLst/>
                           <a:latin typeface="Times New Roman" panose="02020603050405020304" pitchFamily="18" charset="0"/>
                           <a:cs typeface="Times New Roman" panose="02020603050405020304" pitchFamily="18" charset="0"/>
                         </a:rPr>
                         <a:t>Mais rápido</a:t>
                       </a:r>
-                      <a:endParaRPr lang="pt-BR" sz="900" b="0" i="0" u="none" strike="noStrike">
+                      <a:endParaRPr lang="pt-BR" sz="1200" b="0" i="0" u="none" strike="noStrike" dirty="0">
                         <a:solidFill>
                           <a:srgbClr val="000000"/>
                         </a:solidFill>
@@ -8678,7 +8733,7 @@
                   </a:ext>
                 </a:extLst>
               </a:tr>
-              <a:tr h="480833">
+              <a:tr h="485521">
                 <a:tc>
                   <a:txBody>
                     <a:bodyPr/>
@@ -8686,14 +8741,14 @@
                     <a:p>
                       <a:pPr algn="l" fontAlgn="b"/>
                       <a:r>
-                        <a:rPr lang="pt-BR" sz="900" u="none" strike="noStrike">
+                        <a:rPr lang="pt-BR" sz="1200" u="none" strike="noStrike">
                           <a:effectLst/>
                           <a:latin typeface="Times New Roman" panose="02020603050405020304" pitchFamily="18" charset="0"/>
                           <a:cs typeface="Times New Roman" panose="02020603050405020304" pitchFamily="18" charset="0"/>
                         </a:rPr>
                         <a:t>Processamento de script</a:t>
                       </a:r>
-                      <a:endParaRPr lang="pt-BR" sz="900" b="0" i="0" u="none" strike="noStrike">
+                      <a:endParaRPr lang="pt-BR" sz="1200" b="0" i="0" u="none" strike="noStrike">
                         <a:solidFill>
                           <a:srgbClr val="000000"/>
                         </a:solidFill>
@@ -8712,14 +8767,14 @@
                     <a:p>
                       <a:pPr algn="l" fontAlgn="b"/>
                       <a:r>
-                        <a:rPr lang="pt-BR" sz="900" u="none" strike="noStrike">
+                        <a:rPr lang="pt-BR" sz="1200" u="none" strike="noStrike">
                           <a:effectLst/>
                           <a:latin typeface="Times New Roman" panose="02020603050405020304" pitchFamily="18" charset="0"/>
                           <a:cs typeface="Times New Roman" panose="02020603050405020304" pitchFamily="18" charset="0"/>
                         </a:rPr>
                         <a:t>Direto</a:t>
                       </a:r>
-                      <a:endParaRPr lang="pt-BR" sz="900" b="0" i="0" u="none" strike="noStrike">
+                      <a:endParaRPr lang="pt-BR" sz="1200" b="0" i="0" u="none" strike="noStrike">
                         <a:solidFill>
                           <a:srgbClr val="000000"/>
                         </a:solidFill>
@@ -8738,14 +8793,14 @@
                     <a:p>
                       <a:pPr algn="l" fontAlgn="b"/>
                       <a:r>
-                        <a:rPr lang="pt-BR" sz="900" u="none" strike="noStrike">
+                        <a:rPr lang="pt-BR" sz="1200" u="none" strike="noStrike" dirty="0">
                           <a:effectLst/>
                           <a:latin typeface="Times New Roman" panose="02020603050405020304" pitchFamily="18" charset="0"/>
                           <a:cs typeface="Times New Roman" panose="02020603050405020304" pitchFamily="18" charset="0"/>
                         </a:rPr>
                         <a:t>Antes de executar os scripts, ele é traduzido e compilado.</a:t>
                       </a:r>
-                      <a:endParaRPr lang="pt-BR" sz="900" b="0" i="0" u="none" strike="noStrike">
+                      <a:endParaRPr lang="pt-BR" sz="1200" b="0" i="0" u="none" strike="noStrike" dirty="0">
                         <a:solidFill>
                           <a:srgbClr val="000000"/>
                         </a:solidFill>
@@ -8763,7 +8818,7 @@
                   </a:ext>
                 </a:extLst>
               </a:tr>
-              <a:tr h="327523">
+              <a:tr h="330836">
                 <a:tc>
                   <a:txBody>
                     <a:bodyPr/>
@@ -8771,14 +8826,14 @@
                     <a:p>
                       <a:pPr algn="l" fontAlgn="b"/>
                       <a:r>
-                        <a:rPr lang="pt-BR" sz="900" u="none" strike="noStrike">
+                        <a:rPr lang="pt-BR" sz="1200" u="none" strike="noStrike">
                           <a:effectLst/>
                           <a:latin typeface="Times New Roman" panose="02020603050405020304" pitchFamily="18" charset="0"/>
                           <a:cs typeface="Times New Roman" panose="02020603050405020304" pitchFamily="18" charset="0"/>
                         </a:rPr>
                         <a:t>Portabilidade</a:t>
                       </a:r>
-                      <a:endParaRPr lang="pt-BR" sz="900" b="0" i="0" u="none" strike="noStrike">
+                      <a:endParaRPr lang="pt-BR" sz="1200" b="0" i="0" u="none" strike="noStrike">
                         <a:solidFill>
                           <a:srgbClr val="000000"/>
                         </a:solidFill>
@@ -8797,14 +8852,14 @@
                     <a:p>
                       <a:pPr algn="l" fontAlgn="b"/>
                       <a:r>
-                        <a:rPr lang="pt-BR" sz="900" u="none" strike="noStrike">
+                        <a:rPr lang="pt-BR" sz="1200" u="none" strike="noStrike">
                           <a:effectLst/>
                           <a:latin typeface="Times New Roman" panose="02020603050405020304" pitchFamily="18" charset="0"/>
                           <a:cs typeface="Times New Roman" panose="02020603050405020304" pitchFamily="18" charset="0"/>
                         </a:rPr>
                         <a:t>Não pode ser portado</a:t>
                       </a:r>
-                      <a:endParaRPr lang="pt-BR" sz="900" b="0" i="0" u="none" strike="noStrike">
+                      <a:endParaRPr lang="pt-BR" sz="1200" b="0" i="0" u="none" strike="noStrike">
                         <a:solidFill>
                           <a:srgbClr val="000000"/>
                         </a:solidFill>
@@ -8823,14 +8878,14 @@
                     <a:p>
                       <a:pPr algn="l" fontAlgn="b"/>
                       <a:r>
-                        <a:rPr lang="pt-BR" sz="900" u="none" strike="noStrike" dirty="0">
+                        <a:rPr lang="pt-BR" sz="1200" u="none" strike="noStrike" dirty="0">
                           <a:effectLst/>
                           <a:latin typeface="Times New Roman" panose="02020603050405020304" pitchFamily="18" charset="0"/>
                           <a:cs typeface="Times New Roman" panose="02020603050405020304" pitchFamily="18" charset="0"/>
                         </a:rPr>
                         <a:t>Portátil</a:t>
                       </a:r>
-                      <a:endParaRPr lang="pt-BR" sz="900" b="0" i="0" u="none" strike="noStrike" dirty="0">
+                      <a:endParaRPr lang="pt-BR" sz="1200" b="0" i="0" u="none" strike="noStrike" dirty="0">
                         <a:solidFill>
                           <a:srgbClr val="000000"/>
                         </a:solidFill>
